--- a/P_music_folder/PM_Orga_folder/Photos_gallery/illu_ppt.pptx
+++ b/P_music_folder/PM_Orga_folder/Photos_gallery/illu_ppt.pptx
@@ -13186,43 +13186,6 @@
       </p:grpSp>
       <p:pic>
         <p:nvPicPr>
-          <p:cNvPr id="129" name="Image 128">
-            <a:extLst>
-              <a:ext uri="{FF2B5EF4-FFF2-40B4-BE49-F238E27FC236}">
-                <a16:creationId xmlns:a16="http://schemas.microsoft.com/office/drawing/2014/main" id="{1733E73C-743A-CE2E-16F4-1F89E0E96D45}"/>
-              </a:ext>
-            </a:extLst>
-          </p:cNvPr>
-          <p:cNvPicPr>
-            <a:picLocks noChangeAspect="1"/>
-          </p:cNvPicPr>
-          <p:nvPr/>
-        </p:nvPicPr>
-        <p:blipFill>
-          <a:blip r:embed="rId3">
-            <a:extLst>
-              <a:ext uri="{28A0092B-C50C-407E-A947-70E740481C1C}">
-                <a14:useLocalDpi xmlns:a14="http://schemas.microsoft.com/office/drawing/2010/main" val="0"/>
-              </a:ext>
-            </a:extLst>
-          </a:blip>
-          <a:srcRect l="5459" t="42131" r="41359" b="43884"/>
-          <a:stretch>
-            <a:fillRect/>
-          </a:stretch>
-        </p:blipFill>
-        <p:spPr>
-          <a:xfrm>
-            <a:off x="3441855" y="2346570"/>
-            <a:ext cx="2523686" cy="663660"/>
-          </a:xfrm>
-          <a:prstGeom prst="rect">
-            <a:avLst/>
-          </a:prstGeom>
-        </p:spPr>
-      </p:pic>
-      <p:pic>
-        <p:nvPicPr>
           <p:cNvPr id="130" name="Image 129">
             <a:extLst>
               <a:ext uri="{FF2B5EF4-FFF2-40B4-BE49-F238E27FC236}">
@@ -13749,15 +13712,15 @@
               </a:ext>
             </a:extLst>
           </a:blip>
-          <a:srcRect l="17235" t="29847" r="66949" b="33800"/>
+          <a:srcRect l="17234" t="29847" r="32927" b="33800"/>
           <a:stretch>
             <a:fillRect/>
           </a:stretch>
         </p:blipFill>
         <p:spPr>
           <a:xfrm>
-            <a:off x="3295415" y="2650944"/>
-            <a:ext cx="1084601" cy="2493118"/>
+            <a:off x="4777082" y="2100610"/>
+            <a:ext cx="3417805" cy="2493118"/>
           </a:xfrm>
           <a:prstGeom prst="rect">
             <a:avLst/>
@@ -13857,8 +13820,8 @@
         </p:blipFill>
         <p:spPr>
           <a:xfrm>
-            <a:off x="934924" y="3429000"/>
-            <a:ext cx="2352039" cy="1556079"/>
+            <a:off x="2759463" y="3002721"/>
+            <a:ext cx="2039528" cy="1349326"/>
           </a:xfrm>
           <a:prstGeom prst="rect">
             <a:avLst/>
@@ -13879,7 +13842,7 @@
         </p:nvSpPr>
         <p:spPr>
           <a:xfrm>
-            <a:off x="3327457" y="2433115"/>
+            <a:off x="4809124" y="1882781"/>
             <a:ext cx="266272" cy="798195"/>
           </a:xfrm>
           <a:prstGeom prst="rect">
@@ -13931,7 +13894,7 @@
         </p:nvSpPr>
         <p:spPr>
           <a:xfrm>
-            <a:off x="3526730" y="2199497"/>
+            <a:off x="5008397" y="1649163"/>
             <a:ext cx="707428" cy="583828"/>
           </a:xfrm>
           <a:prstGeom prst="rect">
@@ -13971,10 +13934,10 @@
       </p:sp>
       <p:grpSp>
         <p:nvGrpSpPr>
-          <p:cNvPr id="107" name="Grouper 334">
+          <p:cNvPr id="16" name="Groupe 15">
             <a:extLst>
               <a:ext uri="{FF2B5EF4-FFF2-40B4-BE49-F238E27FC236}">
-                <a16:creationId xmlns:a16="http://schemas.microsoft.com/office/drawing/2014/main" id="{88D31E9E-127B-90DF-890B-73BC370CF093}"/>
+                <a16:creationId xmlns:a16="http://schemas.microsoft.com/office/drawing/2014/main" id="{79E0D0DA-7740-1E68-BBCD-EEABBADEF8DD}"/>
               </a:ext>
             </a:extLst>
           </p:cNvPr>
@@ -13983,7 +13946,899 @@
         </p:nvGrpSpPr>
         <p:grpSpPr>
           <a:xfrm>
-            <a:off x="945134" y="2590035"/>
+            <a:off x="5609285" y="2699737"/>
+            <a:ext cx="808468" cy="485797"/>
+            <a:chOff x="4137143" y="3256618"/>
+            <a:chExt cx="808468" cy="485797"/>
+          </a:xfrm>
+        </p:grpSpPr>
+        <p:grpSp>
+          <p:nvGrpSpPr>
+            <p:cNvPr id="6" name="Groupe 5">
+              <a:extLst>
+                <a:ext uri="{FF2B5EF4-FFF2-40B4-BE49-F238E27FC236}">
+                  <a16:creationId xmlns:a16="http://schemas.microsoft.com/office/drawing/2014/main" id="{236F853B-9399-2635-62EA-4D2C3EC3CB35}"/>
+                </a:ext>
+              </a:extLst>
+            </p:cNvPr>
+            <p:cNvGrpSpPr/>
+            <p:nvPr/>
+          </p:nvGrpSpPr>
+          <p:grpSpPr>
+            <a:xfrm>
+              <a:off x="4137143" y="3388998"/>
+              <a:ext cx="808468" cy="353417"/>
+              <a:chOff x="1301409" y="1386879"/>
+              <a:chExt cx="9180027" cy="4012993"/>
+            </a:xfrm>
+          </p:grpSpPr>
+          <p:pic>
+            <p:nvPicPr>
+              <p:cNvPr id="2" name="Image 1">
+                <a:extLst>
+                  <a:ext uri="{FF2B5EF4-FFF2-40B4-BE49-F238E27FC236}">
+                    <a16:creationId xmlns:a16="http://schemas.microsoft.com/office/drawing/2014/main" id="{EE9E13BA-5324-D1D2-C9B5-B6E54BC88605}"/>
+                  </a:ext>
+                </a:extLst>
+              </p:cNvPr>
+              <p:cNvPicPr>
+                <a:picLocks noChangeAspect="1"/>
+              </p:cNvPicPr>
+              <p:nvPr/>
+            </p:nvPicPr>
+            <p:blipFill>
+              <a:blip r:embed="rId3">
+                <a:extLst>
+                  <a:ext uri="{28A0092B-C50C-407E-A947-70E740481C1C}">
+                    <a14:useLocalDpi xmlns:a14="http://schemas.microsoft.com/office/drawing/2010/main" val="0"/>
+                  </a:ext>
+                </a:extLst>
+              </a:blip>
+              <a:srcRect l="20395" t="40790" r="41228" b="30336"/>
+              <a:stretch>
+                <a:fillRect/>
+              </a:stretch>
+            </p:blipFill>
+            <p:spPr>
+              <a:xfrm>
+                <a:off x="1301409" y="1386879"/>
+                <a:ext cx="5334006" cy="4012993"/>
+              </a:xfrm>
+              <a:prstGeom prst="rect">
+                <a:avLst/>
+              </a:prstGeom>
+            </p:spPr>
+          </p:pic>
+          <p:sp>
+            <p:nvSpPr>
+              <p:cNvPr id="3" name="Rectangle : coins arrondis 2">
+                <a:extLst>
+                  <a:ext uri="{FF2B5EF4-FFF2-40B4-BE49-F238E27FC236}">
+                    <a16:creationId xmlns:a16="http://schemas.microsoft.com/office/drawing/2014/main" id="{2EC77536-06BF-8CAA-625F-8314F1E5A9D8}"/>
+                  </a:ext>
+                </a:extLst>
+              </p:cNvPr>
+              <p:cNvSpPr/>
+              <p:nvPr/>
+            </p:nvSpPr>
+            <p:spPr>
+              <a:xfrm rot="21389571">
+                <a:off x="7164196" y="2436979"/>
+                <a:ext cx="3317240" cy="143932"/>
+              </a:xfrm>
+              <a:prstGeom prst="roundRect">
+                <a:avLst>
+                  <a:gd name="adj" fmla="val 50000"/>
+                </a:avLst>
+              </a:prstGeom>
+              <a:solidFill>
+                <a:srgbClr val="191818"/>
+              </a:solidFill>
+              <a:ln>
+                <a:noFill/>
+              </a:ln>
+            </p:spPr>
+            <p:style>
+              <a:lnRef idx="2">
+                <a:schemeClr val="dk1">
+                  <a:shade val="15000"/>
+                </a:schemeClr>
+              </a:lnRef>
+              <a:fillRef idx="1">
+                <a:schemeClr val="dk1"/>
+              </a:fillRef>
+              <a:effectRef idx="0">
+                <a:schemeClr val="dk1"/>
+              </a:effectRef>
+              <a:fontRef idx="minor">
+                <a:schemeClr val="lt1"/>
+              </a:fontRef>
+            </p:style>
+            <p:txBody>
+              <a:bodyPr rtlCol="0" anchor="ctr"/>
+              <a:lstStyle/>
+              <a:p>
+                <a:pPr algn="ctr"/>
+                <a:endParaRPr lang="fr-FR"/>
+              </a:p>
+            </p:txBody>
+          </p:sp>
+          <p:sp>
+            <p:nvSpPr>
+              <p:cNvPr id="4" name="Rectangle : coins arrondis 3">
+                <a:extLst>
+                  <a:ext uri="{FF2B5EF4-FFF2-40B4-BE49-F238E27FC236}">
+                    <a16:creationId xmlns:a16="http://schemas.microsoft.com/office/drawing/2014/main" id="{6A3A30CB-932A-3265-1643-8D4A094A1F34}"/>
+                  </a:ext>
+                </a:extLst>
+              </p:cNvPr>
+              <p:cNvSpPr/>
+              <p:nvPr/>
+            </p:nvSpPr>
+            <p:spPr>
+              <a:xfrm rot="323063">
+                <a:off x="7162336" y="3252088"/>
+                <a:ext cx="3317240" cy="143932"/>
+              </a:xfrm>
+              <a:prstGeom prst="roundRect">
+                <a:avLst>
+                  <a:gd name="adj" fmla="val 50000"/>
+                </a:avLst>
+              </a:prstGeom>
+              <a:solidFill>
+                <a:srgbClr val="191818"/>
+              </a:solidFill>
+              <a:ln>
+                <a:noFill/>
+              </a:ln>
+            </p:spPr>
+            <p:style>
+              <a:lnRef idx="2">
+                <a:schemeClr val="dk1">
+                  <a:shade val="15000"/>
+                </a:schemeClr>
+              </a:lnRef>
+              <a:fillRef idx="1">
+                <a:schemeClr val="dk1"/>
+              </a:fillRef>
+              <a:effectRef idx="0">
+                <a:schemeClr val="dk1"/>
+              </a:effectRef>
+              <a:fontRef idx="minor">
+                <a:schemeClr val="lt1"/>
+              </a:fontRef>
+            </p:style>
+            <p:txBody>
+              <a:bodyPr rtlCol="0" anchor="ctr"/>
+              <a:lstStyle/>
+              <a:p>
+                <a:pPr algn="ctr"/>
+                <a:endParaRPr lang="fr-FR"/>
+              </a:p>
+            </p:txBody>
+          </p:sp>
+          <p:sp>
+            <p:nvSpPr>
+              <p:cNvPr id="5" name="Rectangle : coins arrondis 4">
+                <a:extLst>
+                  <a:ext uri="{FF2B5EF4-FFF2-40B4-BE49-F238E27FC236}">
+                    <a16:creationId xmlns:a16="http://schemas.microsoft.com/office/drawing/2014/main" id="{3DD1848C-FABD-8E15-B6B0-AA1ECB8810BB}"/>
+                  </a:ext>
+                </a:extLst>
+              </p:cNvPr>
+              <p:cNvSpPr/>
+              <p:nvPr/>
+            </p:nvSpPr>
+            <p:spPr>
+              <a:xfrm rot="705653">
+                <a:off x="7077668" y="3985261"/>
+                <a:ext cx="3317240" cy="143932"/>
+              </a:xfrm>
+              <a:prstGeom prst="roundRect">
+                <a:avLst>
+                  <a:gd name="adj" fmla="val 50000"/>
+                </a:avLst>
+              </a:prstGeom>
+              <a:solidFill>
+                <a:srgbClr val="191818"/>
+              </a:solidFill>
+              <a:ln>
+                <a:noFill/>
+              </a:ln>
+            </p:spPr>
+            <p:style>
+              <a:lnRef idx="2">
+                <a:schemeClr val="dk1">
+                  <a:shade val="15000"/>
+                </a:schemeClr>
+              </a:lnRef>
+              <a:fillRef idx="1">
+                <a:schemeClr val="dk1"/>
+              </a:fillRef>
+              <a:effectRef idx="0">
+                <a:schemeClr val="dk1"/>
+              </a:effectRef>
+              <a:fontRef idx="minor">
+                <a:schemeClr val="lt1"/>
+              </a:fontRef>
+            </p:style>
+            <p:txBody>
+              <a:bodyPr rtlCol="0" anchor="ctr"/>
+              <a:lstStyle/>
+              <a:p>
+                <a:pPr algn="ctr"/>
+                <a:endParaRPr lang="fr-FR"/>
+              </a:p>
+            </p:txBody>
+          </p:sp>
+        </p:grpSp>
+        <p:cxnSp>
+          <p:nvCxnSpPr>
+            <p:cNvPr id="14" name="Connecteur droit 13">
+              <a:extLst>
+                <a:ext uri="{FF2B5EF4-FFF2-40B4-BE49-F238E27FC236}">
+                  <a16:creationId xmlns:a16="http://schemas.microsoft.com/office/drawing/2014/main" id="{78076DC2-D49B-11D2-7BCB-CAE5CEF5F1CB}"/>
+                </a:ext>
+              </a:extLst>
+            </p:cNvPr>
+            <p:cNvCxnSpPr>
+              <a:cxnSpLocks/>
+            </p:cNvCxnSpPr>
+            <p:nvPr/>
+          </p:nvCxnSpPr>
+          <p:spPr>
+            <a:xfrm flipV="1">
+              <a:off x="4335780" y="3256618"/>
+              <a:ext cx="0" cy="176117"/>
+            </a:xfrm>
+            <a:prstGeom prst="line">
+              <a:avLst/>
+            </a:prstGeom>
+            <a:ln w="28575"/>
+          </p:spPr>
+          <p:style>
+            <a:lnRef idx="2">
+              <a:schemeClr val="dk1"/>
+            </a:lnRef>
+            <a:fillRef idx="0">
+              <a:schemeClr val="dk1"/>
+            </a:fillRef>
+            <a:effectRef idx="1">
+              <a:schemeClr val="dk1"/>
+            </a:effectRef>
+            <a:fontRef idx="minor">
+              <a:schemeClr val="tx1"/>
+            </a:fontRef>
+          </p:style>
+        </p:cxnSp>
+      </p:grpSp>
+      <p:grpSp>
+        <p:nvGrpSpPr>
+          <p:cNvPr id="17" name="Groupe 16">
+            <a:extLst>
+              <a:ext uri="{FF2B5EF4-FFF2-40B4-BE49-F238E27FC236}">
+                <a16:creationId xmlns:a16="http://schemas.microsoft.com/office/drawing/2014/main" id="{2B3FAC25-1C5F-CBDC-269B-8C865CE268DD}"/>
+              </a:ext>
+            </a:extLst>
+          </p:cNvPr>
+          <p:cNvGrpSpPr/>
+          <p:nvPr/>
+        </p:nvGrpSpPr>
+        <p:grpSpPr>
+          <a:xfrm>
+            <a:off x="6449080" y="2726021"/>
+            <a:ext cx="808468" cy="485797"/>
+            <a:chOff x="4137143" y="3256618"/>
+            <a:chExt cx="808468" cy="485797"/>
+          </a:xfrm>
+        </p:grpSpPr>
+        <p:grpSp>
+          <p:nvGrpSpPr>
+            <p:cNvPr id="18" name="Groupe 17">
+              <a:extLst>
+                <a:ext uri="{FF2B5EF4-FFF2-40B4-BE49-F238E27FC236}">
+                  <a16:creationId xmlns:a16="http://schemas.microsoft.com/office/drawing/2014/main" id="{BA2BBDB2-C996-11D7-CF95-957BF4F344D7}"/>
+                </a:ext>
+              </a:extLst>
+            </p:cNvPr>
+            <p:cNvGrpSpPr/>
+            <p:nvPr/>
+          </p:nvGrpSpPr>
+          <p:grpSpPr>
+            <a:xfrm>
+              <a:off x="4137143" y="3388998"/>
+              <a:ext cx="808468" cy="353417"/>
+              <a:chOff x="1301409" y="1386879"/>
+              <a:chExt cx="9180027" cy="4012993"/>
+            </a:xfrm>
+          </p:grpSpPr>
+          <p:pic>
+            <p:nvPicPr>
+              <p:cNvPr id="20" name="Image 19">
+                <a:extLst>
+                  <a:ext uri="{FF2B5EF4-FFF2-40B4-BE49-F238E27FC236}">
+                    <a16:creationId xmlns:a16="http://schemas.microsoft.com/office/drawing/2014/main" id="{99E32E8D-A724-6595-D2AF-D7ADA204EF5F}"/>
+                  </a:ext>
+                </a:extLst>
+              </p:cNvPr>
+              <p:cNvPicPr>
+                <a:picLocks noChangeAspect="1"/>
+              </p:cNvPicPr>
+              <p:nvPr/>
+            </p:nvPicPr>
+            <p:blipFill>
+              <a:blip r:embed="rId3">
+                <a:extLst>
+                  <a:ext uri="{28A0092B-C50C-407E-A947-70E740481C1C}">
+                    <a14:useLocalDpi xmlns:a14="http://schemas.microsoft.com/office/drawing/2010/main" val="0"/>
+                  </a:ext>
+                </a:extLst>
+              </a:blip>
+              <a:srcRect l="20395" t="40790" r="41228" b="30336"/>
+              <a:stretch>
+                <a:fillRect/>
+              </a:stretch>
+            </p:blipFill>
+            <p:spPr>
+              <a:xfrm>
+                <a:off x="1301409" y="1386879"/>
+                <a:ext cx="5334006" cy="4012993"/>
+              </a:xfrm>
+              <a:prstGeom prst="rect">
+                <a:avLst/>
+              </a:prstGeom>
+            </p:spPr>
+          </p:pic>
+          <p:sp>
+            <p:nvSpPr>
+              <p:cNvPr id="21" name="Rectangle : coins arrondis 20">
+                <a:extLst>
+                  <a:ext uri="{FF2B5EF4-FFF2-40B4-BE49-F238E27FC236}">
+                    <a16:creationId xmlns:a16="http://schemas.microsoft.com/office/drawing/2014/main" id="{32D08221-2A8B-F874-83AB-E7C30AB3A5E6}"/>
+                  </a:ext>
+                </a:extLst>
+              </p:cNvPr>
+              <p:cNvSpPr/>
+              <p:nvPr/>
+            </p:nvSpPr>
+            <p:spPr>
+              <a:xfrm rot="21389571">
+                <a:off x="7164196" y="2436979"/>
+                <a:ext cx="3317240" cy="143932"/>
+              </a:xfrm>
+              <a:prstGeom prst="roundRect">
+                <a:avLst>
+                  <a:gd name="adj" fmla="val 50000"/>
+                </a:avLst>
+              </a:prstGeom>
+              <a:solidFill>
+                <a:srgbClr val="191818"/>
+              </a:solidFill>
+              <a:ln>
+                <a:noFill/>
+              </a:ln>
+            </p:spPr>
+            <p:style>
+              <a:lnRef idx="2">
+                <a:schemeClr val="dk1">
+                  <a:shade val="15000"/>
+                </a:schemeClr>
+              </a:lnRef>
+              <a:fillRef idx="1">
+                <a:schemeClr val="dk1"/>
+              </a:fillRef>
+              <a:effectRef idx="0">
+                <a:schemeClr val="dk1"/>
+              </a:effectRef>
+              <a:fontRef idx="minor">
+                <a:schemeClr val="lt1"/>
+              </a:fontRef>
+            </p:style>
+            <p:txBody>
+              <a:bodyPr rtlCol="0" anchor="ctr"/>
+              <a:lstStyle/>
+              <a:p>
+                <a:pPr algn="ctr"/>
+                <a:endParaRPr lang="fr-FR"/>
+              </a:p>
+            </p:txBody>
+          </p:sp>
+          <p:sp>
+            <p:nvSpPr>
+              <p:cNvPr id="22" name="Rectangle : coins arrondis 21">
+                <a:extLst>
+                  <a:ext uri="{FF2B5EF4-FFF2-40B4-BE49-F238E27FC236}">
+                    <a16:creationId xmlns:a16="http://schemas.microsoft.com/office/drawing/2014/main" id="{ADA35DD2-36EC-B8F1-3309-2C0F91169265}"/>
+                  </a:ext>
+                </a:extLst>
+              </p:cNvPr>
+              <p:cNvSpPr/>
+              <p:nvPr/>
+            </p:nvSpPr>
+            <p:spPr>
+              <a:xfrm rot="323063">
+                <a:off x="7162336" y="3252088"/>
+                <a:ext cx="3317240" cy="143932"/>
+              </a:xfrm>
+              <a:prstGeom prst="roundRect">
+                <a:avLst>
+                  <a:gd name="adj" fmla="val 50000"/>
+                </a:avLst>
+              </a:prstGeom>
+              <a:solidFill>
+                <a:srgbClr val="191818"/>
+              </a:solidFill>
+              <a:ln>
+                <a:noFill/>
+              </a:ln>
+            </p:spPr>
+            <p:style>
+              <a:lnRef idx="2">
+                <a:schemeClr val="dk1">
+                  <a:shade val="15000"/>
+                </a:schemeClr>
+              </a:lnRef>
+              <a:fillRef idx="1">
+                <a:schemeClr val="dk1"/>
+              </a:fillRef>
+              <a:effectRef idx="0">
+                <a:schemeClr val="dk1"/>
+              </a:effectRef>
+              <a:fontRef idx="minor">
+                <a:schemeClr val="lt1"/>
+              </a:fontRef>
+            </p:style>
+            <p:txBody>
+              <a:bodyPr rtlCol="0" anchor="ctr"/>
+              <a:lstStyle/>
+              <a:p>
+                <a:pPr algn="ctr"/>
+                <a:endParaRPr lang="fr-FR"/>
+              </a:p>
+            </p:txBody>
+          </p:sp>
+          <p:sp>
+            <p:nvSpPr>
+              <p:cNvPr id="23" name="Rectangle : coins arrondis 22">
+                <a:extLst>
+                  <a:ext uri="{FF2B5EF4-FFF2-40B4-BE49-F238E27FC236}">
+                    <a16:creationId xmlns:a16="http://schemas.microsoft.com/office/drawing/2014/main" id="{547384F4-7D66-3E06-E53E-6F639A852461}"/>
+                  </a:ext>
+                </a:extLst>
+              </p:cNvPr>
+              <p:cNvSpPr/>
+              <p:nvPr/>
+            </p:nvSpPr>
+            <p:spPr>
+              <a:xfrm rot="705653">
+                <a:off x="7077668" y="3985261"/>
+                <a:ext cx="3317240" cy="143932"/>
+              </a:xfrm>
+              <a:prstGeom prst="roundRect">
+                <a:avLst>
+                  <a:gd name="adj" fmla="val 50000"/>
+                </a:avLst>
+              </a:prstGeom>
+              <a:solidFill>
+                <a:srgbClr val="191818"/>
+              </a:solidFill>
+              <a:ln>
+                <a:noFill/>
+              </a:ln>
+            </p:spPr>
+            <p:style>
+              <a:lnRef idx="2">
+                <a:schemeClr val="dk1">
+                  <a:shade val="15000"/>
+                </a:schemeClr>
+              </a:lnRef>
+              <a:fillRef idx="1">
+                <a:schemeClr val="dk1"/>
+              </a:fillRef>
+              <a:effectRef idx="0">
+                <a:schemeClr val="dk1"/>
+              </a:effectRef>
+              <a:fontRef idx="minor">
+                <a:schemeClr val="lt1"/>
+              </a:fontRef>
+            </p:style>
+            <p:txBody>
+              <a:bodyPr rtlCol="0" anchor="ctr"/>
+              <a:lstStyle/>
+              <a:p>
+                <a:pPr algn="ctr"/>
+                <a:endParaRPr lang="fr-FR"/>
+              </a:p>
+            </p:txBody>
+          </p:sp>
+        </p:grpSp>
+        <p:cxnSp>
+          <p:nvCxnSpPr>
+            <p:cNvPr id="19" name="Connecteur droit 18">
+              <a:extLst>
+                <a:ext uri="{FF2B5EF4-FFF2-40B4-BE49-F238E27FC236}">
+                  <a16:creationId xmlns:a16="http://schemas.microsoft.com/office/drawing/2014/main" id="{030DE7C8-85E9-0726-6DF2-5C9F1236AD02}"/>
+                </a:ext>
+              </a:extLst>
+            </p:cNvPr>
+            <p:cNvCxnSpPr>
+              <a:cxnSpLocks/>
+            </p:cNvCxnSpPr>
+            <p:nvPr/>
+          </p:nvCxnSpPr>
+          <p:spPr>
+            <a:xfrm flipV="1">
+              <a:off x="4335780" y="3256618"/>
+              <a:ext cx="0" cy="176117"/>
+            </a:xfrm>
+            <a:prstGeom prst="line">
+              <a:avLst/>
+            </a:prstGeom>
+            <a:ln w="28575"/>
+          </p:spPr>
+          <p:style>
+            <a:lnRef idx="2">
+              <a:schemeClr val="dk1"/>
+            </a:lnRef>
+            <a:fillRef idx="0">
+              <a:schemeClr val="dk1"/>
+            </a:fillRef>
+            <a:effectRef idx="1">
+              <a:schemeClr val="dk1"/>
+            </a:effectRef>
+            <a:fontRef idx="minor">
+              <a:schemeClr val="tx1"/>
+            </a:fontRef>
+          </p:style>
+        </p:cxnSp>
+      </p:grpSp>
+      <p:grpSp>
+        <p:nvGrpSpPr>
+          <p:cNvPr id="24" name="Groupe 23">
+            <a:extLst>
+              <a:ext uri="{FF2B5EF4-FFF2-40B4-BE49-F238E27FC236}">
+                <a16:creationId xmlns:a16="http://schemas.microsoft.com/office/drawing/2014/main" id="{96BC7D4C-D77B-A54F-05A6-70B657D4A6B7}"/>
+              </a:ext>
+            </a:extLst>
+          </p:cNvPr>
+          <p:cNvGrpSpPr/>
+          <p:nvPr/>
+        </p:nvGrpSpPr>
+        <p:grpSpPr>
+          <a:xfrm flipH="1">
+            <a:off x="7386419" y="2726021"/>
+            <a:ext cx="808468" cy="485797"/>
+            <a:chOff x="4137143" y="3256618"/>
+            <a:chExt cx="808468" cy="485797"/>
+          </a:xfrm>
+        </p:grpSpPr>
+        <p:grpSp>
+          <p:nvGrpSpPr>
+            <p:cNvPr id="26" name="Groupe 25">
+              <a:extLst>
+                <a:ext uri="{FF2B5EF4-FFF2-40B4-BE49-F238E27FC236}">
+                  <a16:creationId xmlns:a16="http://schemas.microsoft.com/office/drawing/2014/main" id="{DF6462AD-C0ED-1D29-32A5-731C1089B1FB}"/>
+                </a:ext>
+              </a:extLst>
+            </p:cNvPr>
+            <p:cNvGrpSpPr/>
+            <p:nvPr/>
+          </p:nvGrpSpPr>
+          <p:grpSpPr>
+            <a:xfrm>
+              <a:off x="4137143" y="3388998"/>
+              <a:ext cx="808468" cy="353417"/>
+              <a:chOff x="1301409" y="1386879"/>
+              <a:chExt cx="9180027" cy="4012993"/>
+            </a:xfrm>
+          </p:grpSpPr>
+          <p:pic>
+            <p:nvPicPr>
+              <p:cNvPr id="30" name="Image 29">
+                <a:extLst>
+                  <a:ext uri="{FF2B5EF4-FFF2-40B4-BE49-F238E27FC236}">
+                    <a16:creationId xmlns:a16="http://schemas.microsoft.com/office/drawing/2014/main" id="{EBE5BD46-ADFF-341F-A54B-267EEFF6FFD2}"/>
+                  </a:ext>
+                </a:extLst>
+              </p:cNvPr>
+              <p:cNvPicPr>
+                <a:picLocks noChangeAspect="1"/>
+              </p:cNvPicPr>
+              <p:nvPr/>
+            </p:nvPicPr>
+            <p:blipFill>
+              <a:blip r:embed="rId3">
+                <a:extLst>
+                  <a:ext uri="{28A0092B-C50C-407E-A947-70E740481C1C}">
+                    <a14:useLocalDpi xmlns:a14="http://schemas.microsoft.com/office/drawing/2010/main" val="0"/>
+                  </a:ext>
+                </a:extLst>
+              </a:blip>
+              <a:srcRect l="20395" t="40790" r="41228" b="30336"/>
+              <a:stretch>
+                <a:fillRect/>
+              </a:stretch>
+            </p:blipFill>
+            <p:spPr>
+              <a:xfrm>
+                <a:off x="1301409" y="1386879"/>
+                <a:ext cx="5334006" cy="4012993"/>
+              </a:xfrm>
+              <a:prstGeom prst="rect">
+                <a:avLst/>
+              </a:prstGeom>
+            </p:spPr>
+          </p:pic>
+          <p:sp>
+            <p:nvSpPr>
+              <p:cNvPr id="33" name="Rectangle : coins arrondis 32">
+                <a:extLst>
+                  <a:ext uri="{FF2B5EF4-FFF2-40B4-BE49-F238E27FC236}">
+                    <a16:creationId xmlns:a16="http://schemas.microsoft.com/office/drawing/2014/main" id="{D6109918-4C86-96AB-7B1D-39686F88167A}"/>
+                  </a:ext>
+                </a:extLst>
+              </p:cNvPr>
+              <p:cNvSpPr/>
+              <p:nvPr/>
+            </p:nvSpPr>
+            <p:spPr>
+              <a:xfrm rot="21389571">
+                <a:off x="7164196" y="2436979"/>
+                <a:ext cx="3317240" cy="143932"/>
+              </a:xfrm>
+              <a:prstGeom prst="roundRect">
+                <a:avLst>
+                  <a:gd name="adj" fmla="val 50000"/>
+                </a:avLst>
+              </a:prstGeom>
+              <a:solidFill>
+                <a:srgbClr val="191818"/>
+              </a:solidFill>
+              <a:ln>
+                <a:noFill/>
+              </a:ln>
+            </p:spPr>
+            <p:style>
+              <a:lnRef idx="2">
+                <a:schemeClr val="dk1">
+                  <a:shade val="15000"/>
+                </a:schemeClr>
+              </a:lnRef>
+              <a:fillRef idx="1">
+                <a:schemeClr val="dk1"/>
+              </a:fillRef>
+              <a:effectRef idx="0">
+                <a:schemeClr val="dk1"/>
+              </a:effectRef>
+              <a:fontRef idx="minor">
+                <a:schemeClr val="lt1"/>
+              </a:fontRef>
+            </p:style>
+            <p:txBody>
+              <a:bodyPr rtlCol="0" anchor="ctr"/>
+              <a:lstStyle/>
+              <a:p>
+                <a:pPr algn="ctr"/>
+                <a:endParaRPr lang="fr-FR"/>
+              </a:p>
+            </p:txBody>
+          </p:sp>
+          <p:sp>
+            <p:nvSpPr>
+              <p:cNvPr id="34" name="Rectangle : coins arrondis 33">
+                <a:extLst>
+                  <a:ext uri="{FF2B5EF4-FFF2-40B4-BE49-F238E27FC236}">
+                    <a16:creationId xmlns:a16="http://schemas.microsoft.com/office/drawing/2014/main" id="{8C8ED4F7-97C3-CB44-412E-2441032598E3}"/>
+                  </a:ext>
+                </a:extLst>
+              </p:cNvPr>
+              <p:cNvSpPr/>
+              <p:nvPr/>
+            </p:nvSpPr>
+            <p:spPr>
+              <a:xfrm rot="323063">
+                <a:off x="7162336" y="3252088"/>
+                <a:ext cx="3317240" cy="143932"/>
+              </a:xfrm>
+              <a:prstGeom prst="roundRect">
+                <a:avLst>
+                  <a:gd name="adj" fmla="val 50000"/>
+                </a:avLst>
+              </a:prstGeom>
+              <a:solidFill>
+                <a:srgbClr val="191818"/>
+              </a:solidFill>
+              <a:ln>
+                <a:noFill/>
+              </a:ln>
+            </p:spPr>
+            <p:style>
+              <a:lnRef idx="2">
+                <a:schemeClr val="dk1">
+                  <a:shade val="15000"/>
+                </a:schemeClr>
+              </a:lnRef>
+              <a:fillRef idx="1">
+                <a:schemeClr val="dk1"/>
+              </a:fillRef>
+              <a:effectRef idx="0">
+                <a:schemeClr val="dk1"/>
+              </a:effectRef>
+              <a:fontRef idx="minor">
+                <a:schemeClr val="lt1"/>
+              </a:fontRef>
+            </p:style>
+            <p:txBody>
+              <a:bodyPr rtlCol="0" anchor="ctr"/>
+              <a:lstStyle/>
+              <a:p>
+                <a:pPr algn="ctr"/>
+                <a:endParaRPr lang="fr-FR"/>
+              </a:p>
+            </p:txBody>
+          </p:sp>
+          <p:sp>
+            <p:nvSpPr>
+              <p:cNvPr id="35" name="Rectangle : coins arrondis 34">
+                <a:extLst>
+                  <a:ext uri="{FF2B5EF4-FFF2-40B4-BE49-F238E27FC236}">
+                    <a16:creationId xmlns:a16="http://schemas.microsoft.com/office/drawing/2014/main" id="{DB53D530-BF30-3B6C-438E-53370F19E378}"/>
+                  </a:ext>
+                </a:extLst>
+              </p:cNvPr>
+              <p:cNvSpPr/>
+              <p:nvPr/>
+            </p:nvSpPr>
+            <p:spPr>
+              <a:xfrm rot="705653">
+                <a:off x="7077668" y="3985261"/>
+                <a:ext cx="3317240" cy="143932"/>
+              </a:xfrm>
+              <a:prstGeom prst="roundRect">
+                <a:avLst>
+                  <a:gd name="adj" fmla="val 50000"/>
+                </a:avLst>
+              </a:prstGeom>
+              <a:solidFill>
+                <a:srgbClr val="191818"/>
+              </a:solidFill>
+              <a:ln>
+                <a:noFill/>
+              </a:ln>
+            </p:spPr>
+            <p:style>
+              <a:lnRef idx="2">
+                <a:schemeClr val="dk1">
+                  <a:shade val="15000"/>
+                </a:schemeClr>
+              </a:lnRef>
+              <a:fillRef idx="1">
+                <a:schemeClr val="dk1"/>
+              </a:fillRef>
+              <a:effectRef idx="0">
+                <a:schemeClr val="dk1"/>
+              </a:effectRef>
+              <a:fontRef idx="minor">
+                <a:schemeClr val="lt1"/>
+              </a:fontRef>
+            </p:style>
+            <p:txBody>
+              <a:bodyPr rtlCol="0" anchor="ctr"/>
+              <a:lstStyle/>
+              <a:p>
+                <a:pPr algn="ctr"/>
+                <a:endParaRPr lang="fr-FR"/>
+              </a:p>
+            </p:txBody>
+          </p:sp>
+        </p:grpSp>
+        <p:cxnSp>
+          <p:nvCxnSpPr>
+            <p:cNvPr id="27" name="Connecteur droit 26">
+              <a:extLst>
+                <a:ext uri="{FF2B5EF4-FFF2-40B4-BE49-F238E27FC236}">
+                  <a16:creationId xmlns:a16="http://schemas.microsoft.com/office/drawing/2014/main" id="{F5EB7A39-BB11-262A-12AE-1EB97AA4ECAD}"/>
+                </a:ext>
+              </a:extLst>
+            </p:cNvPr>
+            <p:cNvCxnSpPr>
+              <a:cxnSpLocks/>
+            </p:cNvCxnSpPr>
+            <p:nvPr/>
+          </p:nvCxnSpPr>
+          <p:spPr>
+            <a:xfrm flipV="1">
+              <a:off x="4335780" y="3256618"/>
+              <a:ext cx="0" cy="176117"/>
+            </a:xfrm>
+            <a:prstGeom prst="line">
+              <a:avLst/>
+            </a:prstGeom>
+            <a:ln w="28575"/>
+          </p:spPr>
+          <p:style>
+            <a:lnRef idx="2">
+              <a:schemeClr val="dk1"/>
+            </a:lnRef>
+            <a:fillRef idx="0">
+              <a:schemeClr val="dk1"/>
+            </a:fillRef>
+            <a:effectRef idx="1">
+              <a:schemeClr val="dk1"/>
+            </a:effectRef>
+            <a:fontRef idx="minor">
+              <a:schemeClr val="tx1"/>
+            </a:fontRef>
+          </p:style>
+        </p:cxnSp>
+      </p:grpSp>
+      <p:sp>
+        <p:nvSpPr>
+          <p:cNvPr id="36" name="Rectangle 35">
+            <a:extLst>
+              <a:ext uri="{FF2B5EF4-FFF2-40B4-BE49-F238E27FC236}">
+                <a16:creationId xmlns:a16="http://schemas.microsoft.com/office/drawing/2014/main" id="{BB6683F1-8537-EC4B-E24B-7104435EA25E}"/>
+              </a:ext>
+            </a:extLst>
+          </p:cNvPr>
+          <p:cNvSpPr/>
+          <p:nvPr/>
+        </p:nvSpPr>
+        <p:spPr>
+          <a:xfrm>
+            <a:off x="5918200" y="3276599"/>
+            <a:ext cx="2463800" cy="1449505"/>
+          </a:xfrm>
+          <a:prstGeom prst="rect">
+            <a:avLst/>
+          </a:prstGeom>
+          <a:solidFill>
+            <a:schemeClr val="bg1"/>
+          </a:solidFill>
+          <a:ln>
+            <a:noFill/>
+          </a:ln>
+        </p:spPr>
+        <p:style>
+          <a:lnRef idx="2">
+            <a:schemeClr val="accent1">
+              <a:shade val="15000"/>
+            </a:schemeClr>
+          </a:lnRef>
+          <a:fillRef idx="1">
+            <a:schemeClr val="accent1"/>
+          </a:fillRef>
+          <a:effectRef idx="0">
+            <a:schemeClr val="accent1"/>
+          </a:effectRef>
+          <a:fontRef idx="minor">
+            <a:schemeClr val="lt1"/>
+          </a:fontRef>
+        </p:style>
+        <p:txBody>
+          <a:bodyPr rtlCol="0" anchor="ctr"/>
+          <a:lstStyle/>
+          <a:p>
+            <a:pPr algn="ctr"/>
+            <a:endParaRPr lang="fr-FR"/>
+          </a:p>
+        </p:txBody>
+      </p:sp>
+      <p:grpSp>
+        <p:nvGrpSpPr>
+          <p:cNvPr id="37" name="Grouper 334">
+            <a:extLst>
+              <a:ext uri="{FF2B5EF4-FFF2-40B4-BE49-F238E27FC236}">
+                <a16:creationId xmlns:a16="http://schemas.microsoft.com/office/drawing/2014/main" id="{88D31E9E-127B-90DF-890B-73BC370CF093}"/>
+              </a:ext>
+            </a:extLst>
+          </p:cNvPr>
+          <p:cNvGrpSpPr/>
+          <p:nvPr/>
+        </p:nvGrpSpPr>
+        <p:grpSpPr>
+          <a:xfrm>
+            <a:off x="5757589" y="3464159"/>
             <a:ext cx="1035468" cy="810823"/>
             <a:chOff x="7584282" y="3392488"/>
             <a:chExt cx="468312" cy="366712"/>
@@ -13991,7 +14846,7 @@
         </p:grpSpPr>
         <p:sp>
           <p:nvSpPr>
-            <p:cNvPr id="108" name="Freeform 119">
+            <p:cNvPr id="38" name="Freeform 119">
               <a:extLst>
                 <a:ext uri="{FF2B5EF4-FFF2-40B4-BE49-F238E27FC236}">
                   <a16:creationId xmlns:a16="http://schemas.microsoft.com/office/drawing/2014/main" id="{D749A70F-49FC-9275-ADA6-490F8810E9E0}"/>
@@ -14102,7 +14957,7 @@
         </p:sp>
         <p:sp>
           <p:nvSpPr>
-            <p:cNvPr id="109" name="Freeform 120">
+            <p:cNvPr id="39" name="Freeform 120">
               <a:extLst>
                 <a:ext uri="{FF2B5EF4-FFF2-40B4-BE49-F238E27FC236}">
                   <a16:creationId xmlns:a16="http://schemas.microsoft.com/office/drawing/2014/main" id="{623C453F-9E3E-1DC7-A5D2-035FF9D43B6C}"/>
@@ -14205,7 +15060,7 @@
         </p:sp>
         <p:sp>
           <p:nvSpPr>
-            <p:cNvPr id="110" name="Line 121">
+            <p:cNvPr id="40" name="Line 121">
               <a:extLst>
                 <a:ext uri="{FF2B5EF4-FFF2-40B4-BE49-F238E27FC236}">
                   <a16:creationId xmlns:a16="http://schemas.microsoft.com/office/drawing/2014/main" id="{1C648F4D-B57E-0DDE-EBE7-335C1F40D1A3}"/>
@@ -14264,7 +15119,7 @@
         </p:sp>
         <p:sp>
           <p:nvSpPr>
-            <p:cNvPr id="111" name="Line 122">
+            <p:cNvPr id="41" name="Line 122">
               <a:extLst>
                 <a:ext uri="{FF2B5EF4-FFF2-40B4-BE49-F238E27FC236}">
                   <a16:creationId xmlns:a16="http://schemas.microsoft.com/office/drawing/2014/main" id="{75EF3420-BBCF-6C3F-2DDD-7C6D22022848}"/>
@@ -14324,10 +15179,10 @@
       </p:grpSp>
       <p:grpSp>
         <p:nvGrpSpPr>
-          <p:cNvPr id="117" name="Grouper 46">
+          <p:cNvPr id="42" name="Grouper 318">
             <a:extLst>
               <a:ext uri="{FF2B5EF4-FFF2-40B4-BE49-F238E27FC236}">
-                <a16:creationId xmlns:a16="http://schemas.microsoft.com/office/drawing/2014/main" id="{EC98388B-B477-EB90-716E-F5855E0AD487}"/>
+                <a16:creationId xmlns:a16="http://schemas.microsoft.com/office/drawing/2014/main" id="{D8581533-A0F6-A0AB-0978-094CD21EA590}"/>
               </a:ext>
             </a:extLst>
           </p:cNvPr>
@@ -14336,18 +15191,18 @@
         </p:nvGrpSpPr>
         <p:grpSpPr>
           <a:xfrm>
-            <a:off x="1584416" y="2962634"/>
-            <a:ext cx="480900" cy="438224"/>
-            <a:chOff x="4055197" y="4220351"/>
-            <a:chExt cx="284162" cy="295275"/>
+            <a:off x="6421459" y="3762782"/>
+            <a:ext cx="339206" cy="399878"/>
+            <a:chOff x="5187157" y="890588"/>
+            <a:chExt cx="390525" cy="460375"/>
           </a:xfrm>
         </p:grpSpPr>
         <p:sp>
           <p:nvSpPr>
-            <p:cNvPr id="118" name="Freeform 36">
+            <p:cNvPr id="43" name="Freeform 1">
               <a:extLst>
                 <a:ext uri="{FF2B5EF4-FFF2-40B4-BE49-F238E27FC236}">
-                  <a16:creationId xmlns:a16="http://schemas.microsoft.com/office/drawing/2014/main" id="{A908BAAC-0C42-4E85-799F-BBB6B7BE88B8}"/>
+                  <a16:creationId xmlns:a16="http://schemas.microsoft.com/office/drawing/2014/main" id="{56EF95D7-7005-622F-8A61-122A340B7529}"/>
                 </a:ext>
               </a:extLst>
             </p:cNvPr>
@@ -14358,18 +15213,22 @@
           </p:nvSpPr>
           <p:spPr bwMode="auto">
             <a:xfrm>
-              <a:off x="4196484" y="4333064"/>
-              <a:ext cx="41275" cy="80962"/>
+              <a:off x="5187157" y="1168400"/>
+              <a:ext cx="163512" cy="182563"/>
             </a:xfrm>
             <a:custGeom>
               <a:avLst/>
               <a:gdLst>
-                <a:gd name="T0" fmla="*/ 0 w 113"/>
-                <a:gd name="T1" fmla="*/ 0 h 226"/>
-                <a:gd name="T2" fmla="*/ 112 w 113"/>
-                <a:gd name="T3" fmla="*/ 113 h 226"/>
-                <a:gd name="T4" fmla="*/ 0 w 113"/>
-                <a:gd name="T5" fmla="*/ 225 h 226"/>
+                <a:gd name="T0" fmla="*/ 113 w 452"/>
+                <a:gd name="T1" fmla="*/ 0 h 509"/>
+                <a:gd name="T2" fmla="*/ 113 w 452"/>
+                <a:gd name="T3" fmla="*/ 197 h 509"/>
+                <a:gd name="T4" fmla="*/ 0 w 452"/>
+                <a:gd name="T5" fmla="*/ 508 h 509"/>
+                <a:gd name="T6" fmla="*/ 451 w 452"/>
+                <a:gd name="T7" fmla="*/ 508 h 509"/>
+                <a:gd name="T8" fmla="*/ 423 w 452"/>
+                <a:gd name="T9" fmla="*/ 367 h 509"/>
               </a:gdLst>
               <a:ahLst/>
               <a:cxnLst>
@@ -14382,22 +15241,36 @@
                 <a:cxn ang="0">
                   <a:pos x="T4" y="T5"/>
                 </a:cxn>
+                <a:cxn ang="0">
+                  <a:pos x="T6" y="T7"/>
+                </a:cxn>
+                <a:cxn ang="0">
+                  <a:pos x="T8" y="T9"/>
+                </a:cxn>
               </a:cxnLst>
               <a:rect l="0" t="0" r="r" b="b"/>
               <a:pathLst>
-                <a:path w="113" h="226">
+                <a:path w="452" h="509">
                   <a:moveTo>
-                    <a:pt x="0" y="0"/>
+                    <a:pt x="113" y="0"/>
                   </a:moveTo>
                   <a:cubicBezTo>
-                    <a:pt x="62" y="0"/>
-                    <a:pt x="112" y="53"/>
-                    <a:pt x="112" y="113"/>
+                    <a:pt x="65" y="28"/>
+                    <a:pt x="39" y="135"/>
+                    <a:pt x="113" y="197"/>
                   </a:cubicBezTo>
                   <a:cubicBezTo>
-                    <a:pt x="112" y="172"/>
-                    <a:pt x="62" y="225"/>
-                    <a:pt x="0" y="225"/>
+                    <a:pt x="82" y="225"/>
+                    <a:pt x="0" y="358"/>
+                    <a:pt x="0" y="508"/>
+                  </a:cubicBezTo>
+                  <a:lnTo>
+                    <a:pt x="451" y="508"/>
+                  </a:lnTo>
+                  <a:cubicBezTo>
+                    <a:pt x="451" y="465"/>
+                    <a:pt x="443" y="400"/>
+                    <a:pt x="423" y="367"/>
                   </a:cubicBezTo>
                 </a:path>
               </a:pathLst>
@@ -14443,10 +15316,10 @@
         </p:sp>
         <p:sp>
           <p:nvSpPr>
-            <p:cNvPr id="119" name="Freeform 37">
+            <p:cNvPr id="44" name="Freeform 2">
               <a:extLst>
                 <a:ext uri="{FF2B5EF4-FFF2-40B4-BE49-F238E27FC236}">
-                  <a16:creationId xmlns:a16="http://schemas.microsoft.com/office/drawing/2014/main" id="{C9D17CB1-C54E-1E24-329F-E72AF9753942}"/>
+                  <a16:creationId xmlns:a16="http://schemas.microsoft.com/office/drawing/2014/main" id="{EAD0A36D-15D7-3230-512C-B5E044CB7061}"/>
                 </a:ext>
               </a:extLst>
             </p:cNvPr>
@@ -14457,34 +15330,22 @@
           </p:nvSpPr>
           <p:spPr bwMode="auto">
             <a:xfrm>
-              <a:off x="4055197" y="4220351"/>
-              <a:ext cx="142875" cy="295275"/>
+              <a:off x="5282407" y="890588"/>
+              <a:ext cx="295275" cy="403225"/>
             </a:xfrm>
             <a:custGeom>
               <a:avLst/>
               <a:gdLst>
-                <a:gd name="T0" fmla="*/ 855 w 904"/>
-                <a:gd name="T1" fmla="*/ 17 h 820"/>
-                <a:gd name="T2" fmla="*/ 507 w 904"/>
-                <a:gd name="T3" fmla="*/ 226 h 820"/>
-                <a:gd name="T4" fmla="*/ 169 w 904"/>
-                <a:gd name="T5" fmla="*/ 226 h 820"/>
-                <a:gd name="T6" fmla="*/ 0 w 904"/>
-                <a:gd name="T7" fmla="*/ 395 h 820"/>
-                <a:gd name="T8" fmla="*/ 0 w 904"/>
-                <a:gd name="T9" fmla="*/ 424 h 820"/>
-                <a:gd name="T10" fmla="*/ 169 w 904"/>
-                <a:gd name="T11" fmla="*/ 593 h 820"/>
-                <a:gd name="T12" fmla="*/ 507 w 904"/>
-                <a:gd name="T13" fmla="*/ 593 h 820"/>
-                <a:gd name="T14" fmla="*/ 855 w 904"/>
-                <a:gd name="T15" fmla="*/ 802 h 820"/>
-                <a:gd name="T16" fmla="*/ 903 w 904"/>
-                <a:gd name="T17" fmla="*/ 782 h 820"/>
-                <a:gd name="T18" fmla="*/ 903 w 904"/>
-                <a:gd name="T19" fmla="*/ 40 h 820"/>
-                <a:gd name="T20" fmla="*/ 855 w 904"/>
-                <a:gd name="T21" fmla="*/ 17 h 820"/>
+                <a:gd name="T0" fmla="*/ 559 w 819"/>
+                <a:gd name="T1" fmla="*/ 263 h 1119"/>
+                <a:gd name="T2" fmla="*/ 135 w 819"/>
+                <a:gd name="T3" fmla="*/ 62 h 1119"/>
+                <a:gd name="T4" fmla="*/ 172 w 819"/>
+                <a:gd name="T5" fmla="*/ 692 h 1119"/>
+                <a:gd name="T6" fmla="*/ 700 w 819"/>
+                <a:gd name="T7" fmla="*/ 1039 h 1119"/>
+                <a:gd name="T8" fmla="*/ 739 w 819"/>
+                <a:gd name="T9" fmla="*/ 570 h 1119"/>
               </a:gdLst>
               <a:ahLst/>
               <a:cxnLst>
@@ -14503,72 +15364,32 @@
                 <a:cxn ang="0">
                   <a:pos x="T8" y="T9"/>
                 </a:cxn>
-                <a:cxn ang="0">
-                  <a:pos x="T10" y="T11"/>
-                </a:cxn>
-                <a:cxn ang="0">
-                  <a:pos x="T12" y="T13"/>
-                </a:cxn>
-                <a:cxn ang="0">
-                  <a:pos x="T14" y="T15"/>
-                </a:cxn>
-                <a:cxn ang="0">
-                  <a:pos x="T16" y="T17"/>
-                </a:cxn>
-                <a:cxn ang="0">
-                  <a:pos x="T18" y="T19"/>
-                </a:cxn>
-                <a:cxn ang="0">
-                  <a:pos x="T20" y="T21"/>
-                </a:cxn>
               </a:cxnLst>
               <a:rect l="0" t="0" r="r" b="b"/>
               <a:pathLst>
-                <a:path w="904" h="820">
+                <a:path w="819" h="1119">
                   <a:moveTo>
-                    <a:pt x="855" y="17"/>
+                    <a:pt x="559" y="263"/>
                   </a:moveTo>
                   <a:cubicBezTo>
-                    <a:pt x="744" y="119"/>
-                    <a:pt x="603" y="226"/>
-                    <a:pt x="507" y="226"/>
-                  </a:cubicBezTo>
-                  <a:lnTo>
-                    <a:pt x="169" y="226"/>
-                  </a:lnTo>
-                  <a:cubicBezTo>
-                    <a:pt x="76" y="226"/>
-                    <a:pt x="0" y="302"/>
-                    <a:pt x="0" y="395"/>
-                  </a:cubicBezTo>
-                  <a:lnTo>
-                    <a:pt x="0" y="424"/>
-                  </a:lnTo>
-                  <a:cubicBezTo>
-                    <a:pt x="0" y="517"/>
-                    <a:pt x="76" y="593"/>
-                    <a:pt x="169" y="593"/>
-                  </a:cubicBezTo>
-                  <a:lnTo>
-                    <a:pt x="507" y="593"/>
-                  </a:lnTo>
-                  <a:cubicBezTo>
-                    <a:pt x="603" y="593"/>
-                    <a:pt x="744" y="700"/>
-                    <a:pt x="855" y="802"/>
+                    <a:pt x="415" y="88"/>
+                    <a:pt x="243" y="0"/>
+                    <a:pt x="135" y="62"/>
                   </a:cubicBezTo>
                   <a:cubicBezTo>
-                    <a:pt x="871" y="819"/>
-                    <a:pt x="903" y="805"/>
-                    <a:pt x="903" y="782"/>
+                    <a:pt x="0" y="141"/>
+                    <a:pt x="17" y="424"/>
+                    <a:pt x="172" y="692"/>
                   </a:cubicBezTo>
-                  <a:lnTo>
-                    <a:pt x="903" y="40"/>
-                  </a:lnTo>
                   <a:cubicBezTo>
-                    <a:pt x="903" y="14"/>
-                    <a:pt x="874" y="0"/>
-                    <a:pt x="855" y="17"/>
+                    <a:pt x="327" y="963"/>
+                    <a:pt x="564" y="1118"/>
+                    <a:pt x="700" y="1039"/>
+                  </a:cubicBezTo>
+                  <a:cubicBezTo>
+                    <a:pt x="807" y="977"/>
+                    <a:pt x="818" y="785"/>
+                    <a:pt x="739" y="570"/>
                   </a:cubicBezTo>
                 </a:path>
               </a:pathLst>
@@ -14605,7 +15426,7 @@
             </a:extLst>
           </p:spPr>
           <p:txBody>
-            <a:bodyPr wrap="none" anchor="ctr"/>
+            <a:bodyPr/>
             <a:lstStyle/>
             <a:p>
               <a:endParaRPr lang="fr-FR"/>
@@ -14614,10 +15435,10 @@
         </p:sp>
         <p:sp>
           <p:nvSpPr>
-            <p:cNvPr id="120" name="Freeform 39">
+            <p:cNvPr id="45" name="Freeform 3">
               <a:extLst>
                 <a:ext uri="{FF2B5EF4-FFF2-40B4-BE49-F238E27FC236}">
-                  <a16:creationId xmlns:a16="http://schemas.microsoft.com/office/drawing/2014/main" id="{A05B8FB9-F8D5-37B3-1B6A-8D5D6A1BA1DA}"/>
+                  <a16:creationId xmlns:a16="http://schemas.microsoft.com/office/drawing/2014/main" id="{AC11D5D6-4EA6-713F-4484-70CC05790D51}"/>
                 </a:ext>
               </a:extLst>
             </p:cNvPr>
@@ -14628,18 +15449,18 @@
           </p:nvSpPr>
           <p:spPr bwMode="auto">
             <a:xfrm>
-              <a:off x="4286972" y="4261626"/>
-              <a:ext cx="52387" cy="223838"/>
+              <a:off x="5209382" y="912813"/>
+              <a:ext cx="325437" cy="406400"/>
             </a:xfrm>
             <a:custGeom>
               <a:avLst/>
               <a:gdLst>
-                <a:gd name="T0" fmla="*/ 0 w 145"/>
-                <a:gd name="T1" fmla="*/ 621 h 622"/>
-                <a:gd name="T2" fmla="*/ 144 w 145"/>
-                <a:gd name="T3" fmla="*/ 311 h 622"/>
-                <a:gd name="T4" fmla="*/ 0 w 145"/>
-                <a:gd name="T5" fmla="*/ 0 h 622"/>
+                <a:gd name="T0" fmla="*/ 338 w 904"/>
+                <a:gd name="T1" fmla="*/ 0 h 1127"/>
+                <a:gd name="T2" fmla="*/ 155 w 904"/>
+                <a:gd name="T3" fmla="*/ 757 h 1127"/>
+                <a:gd name="T4" fmla="*/ 903 w 904"/>
+                <a:gd name="T5" fmla="*/ 977 h 1127"/>
               </a:gdLst>
               <a:ahLst/>
               <a:cxnLst>
@@ -14655,19 +15476,19 @@
               </a:cxnLst>
               <a:rect l="0" t="0" r="r" b="b"/>
               <a:pathLst>
-                <a:path w="145" h="622">
+                <a:path w="904" h="1127">
                   <a:moveTo>
-                    <a:pt x="0" y="621"/>
+                    <a:pt x="338" y="0"/>
                   </a:moveTo>
                   <a:cubicBezTo>
-                    <a:pt x="90" y="536"/>
-                    <a:pt x="144" y="432"/>
-                    <a:pt x="144" y="311"/>
+                    <a:pt x="81" y="147"/>
+                    <a:pt x="0" y="489"/>
+                    <a:pt x="155" y="757"/>
                   </a:cubicBezTo>
                   <a:cubicBezTo>
-                    <a:pt x="144" y="189"/>
-                    <a:pt x="90" y="85"/>
-                    <a:pt x="0" y="0"/>
+                    <a:pt x="310" y="1028"/>
+                    <a:pt x="646" y="1126"/>
+                    <a:pt x="903" y="977"/>
                   </a:cubicBezTo>
                 </a:path>
               </a:pathLst>
@@ -14713,10 +15534,10 @@
         </p:sp>
         <p:sp>
           <p:nvSpPr>
-            <p:cNvPr id="121" name="Freeform 40">
+            <p:cNvPr id="46" name="Freeform 4">
               <a:extLst>
                 <a:ext uri="{FF2B5EF4-FFF2-40B4-BE49-F238E27FC236}">
-                  <a16:creationId xmlns:a16="http://schemas.microsoft.com/office/drawing/2014/main" id="{002BC541-55F6-F383-92AC-AE62665D7B5B}"/>
+                  <a16:creationId xmlns:a16="http://schemas.microsoft.com/office/drawing/2014/main" id="{18EF7769-476A-200C-20DB-33D108307E9A}"/>
                 </a:ext>
               </a:extLst>
             </p:cNvPr>
@@ -14727,18 +15548,36 @@
           </p:nvSpPr>
           <p:spPr bwMode="auto">
             <a:xfrm>
-              <a:off x="4247284" y="4282264"/>
-              <a:ext cx="41275" cy="182562"/>
+              <a:off x="5380832" y="1004888"/>
+              <a:ext cx="173037" cy="123825"/>
             </a:xfrm>
             <a:custGeom>
               <a:avLst/>
               <a:gdLst>
-                <a:gd name="T0" fmla="*/ 0 w 113"/>
-                <a:gd name="T1" fmla="*/ 508 h 509"/>
-                <a:gd name="T2" fmla="*/ 112 w 113"/>
-                <a:gd name="T3" fmla="*/ 254 h 509"/>
-                <a:gd name="T4" fmla="*/ 0 w 113"/>
-                <a:gd name="T5" fmla="*/ 0 h 509"/>
+                <a:gd name="T0" fmla="*/ 42 w 480"/>
+                <a:gd name="T1" fmla="*/ 345 h 346"/>
+                <a:gd name="T2" fmla="*/ 265 w 480"/>
+                <a:gd name="T3" fmla="*/ 215 h 346"/>
+                <a:gd name="T4" fmla="*/ 265 w 480"/>
+                <a:gd name="T5" fmla="*/ 215 h 346"/>
+                <a:gd name="T6" fmla="*/ 327 w 480"/>
+                <a:gd name="T7" fmla="*/ 229 h 346"/>
+                <a:gd name="T8" fmla="*/ 448 w 480"/>
+                <a:gd name="T9" fmla="*/ 158 h 346"/>
+                <a:gd name="T10" fmla="*/ 468 w 480"/>
+                <a:gd name="T11" fmla="*/ 99 h 346"/>
+                <a:gd name="T12" fmla="*/ 426 w 480"/>
+                <a:gd name="T13" fmla="*/ 26 h 346"/>
+                <a:gd name="T14" fmla="*/ 364 w 480"/>
+                <a:gd name="T15" fmla="*/ 12 h 346"/>
+                <a:gd name="T16" fmla="*/ 242 w 480"/>
+                <a:gd name="T17" fmla="*/ 82 h 346"/>
+                <a:gd name="T18" fmla="*/ 222 w 480"/>
+                <a:gd name="T19" fmla="*/ 141 h 346"/>
+                <a:gd name="T20" fmla="*/ 222 w 480"/>
+                <a:gd name="T21" fmla="*/ 141 h 346"/>
+                <a:gd name="T22" fmla="*/ 0 w 480"/>
+                <a:gd name="T23" fmla="*/ 271 h 346"/>
               </a:gdLst>
               <a:ahLst/>
               <a:cxnLst>
@@ -14751,23 +15590,81 @@
                 <a:cxn ang="0">
                   <a:pos x="T4" y="T5"/>
                 </a:cxn>
+                <a:cxn ang="0">
+                  <a:pos x="T6" y="T7"/>
+                </a:cxn>
+                <a:cxn ang="0">
+                  <a:pos x="T8" y="T9"/>
+                </a:cxn>
+                <a:cxn ang="0">
+                  <a:pos x="T10" y="T11"/>
+                </a:cxn>
+                <a:cxn ang="0">
+                  <a:pos x="T12" y="T13"/>
+                </a:cxn>
+                <a:cxn ang="0">
+                  <a:pos x="T14" y="T15"/>
+                </a:cxn>
+                <a:cxn ang="0">
+                  <a:pos x="T16" y="T17"/>
+                </a:cxn>
+                <a:cxn ang="0">
+                  <a:pos x="T18" y="T19"/>
+                </a:cxn>
+                <a:cxn ang="0">
+                  <a:pos x="T20" y="T21"/>
+                </a:cxn>
+                <a:cxn ang="0">
+                  <a:pos x="T22" y="T23"/>
+                </a:cxn>
               </a:cxnLst>
               <a:rect l="0" t="0" r="r" b="b"/>
               <a:pathLst>
-                <a:path w="113" h="509">
+                <a:path w="480" h="346">
                   <a:moveTo>
-                    <a:pt x="0" y="508"/>
+                    <a:pt x="42" y="345"/>
                   </a:moveTo>
+                  <a:lnTo>
+                    <a:pt x="265" y="215"/>
+                  </a:lnTo>
+                  <a:lnTo>
+                    <a:pt x="265" y="215"/>
+                  </a:lnTo>
                   <a:cubicBezTo>
-                    <a:pt x="70" y="437"/>
-                    <a:pt x="112" y="352"/>
-                    <a:pt x="112" y="254"/>
+                    <a:pt x="276" y="235"/>
+                    <a:pt x="304" y="240"/>
+                    <a:pt x="327" y="229"/>
                   </a:cubicBezTo>
+                  <a:lnTo>
+                    <a:pt x="448" y="158"/>
+                  </a:lnTo>
                   <a:cubicBezTo>
-                    <a:pt x="112" y="155"/>
-                    <a:pt x="70" y="70"/>
-                    <a:pt x="0" y="0"/>
+                    <a:pt x="471" y="144"/>
+                    <a:pt x="479" y="119"/>
+                    <a:pt x="468" y="99"/>
                   </a:cubicBezTo>
+                  <a:lnTo>
+                    <a:pt x="426" y="26"/>
+                  </a:lnTo>
+                  <a:cubicBezTo>
+                    <a:pt x="414" y="6"/>
+                    <a:pt x="386" y="0"/>
+                    <a:pt x="364" y="12"/>
+                  </a:cubicBezTo>
+                  <a:lnTo>
+                    <a:pt x="242" y="82"/>
+                  </a:lnTo>
+                  <a:cubicBezTo>
+                    <a:pt x="220" y="96"/>
+                    <a:pt x="211" y="122"/>
+                    <a:pt x="222" y="141"/>
+                  </a:cubicBezTo>
+                  <a:lnTo>
+                    <a:pt x="222" y="141"/>
+                  </a:lnTo>
+                  <a:lnTo>
+                    <a:pt x="0" y="271"/>
+                  </a:lnTo>
                 </a:path>
               </a:pathLst>
             </a:custGeom>
@@ -14811,226 +15708,43 @@
           </p:txBody>
         </p:sp>
       </p:grpSp>
-      <p:grpSp>
-        <p:nvGrpSpPr>
-          <p:cNvPr id="6" name="Groupe 5">
+      <p:pic>
+        <p:nvPicPr>
+          <p:cNvPr id="47" name="Image 46">
             <a:extLst>
               <a:ext uri="{FF2B5EF4-FFF2-40B4-BE49-F238E27FC236}">
-                <a16:creationId xmlns:a16="http://schemas.microsoft.com/office/drawing/2014/main" id="{236F853B-9399-2635-62EA-4D2C3EC3CB35}"/>
+                <a16:creationId xmlns:a16="http://schemas.microsoft.com/office/drawing/2014/main" id="{22C1E5D2-8C19-BADD-E803-227C9C8A43C5}"/>
               </a:ext>
             </a:extLst>
           </p:cNvPr>
-          <p:cNvGrpSpPr/>
+          <p:cNvPicPr>
+            <a:picLocks noChangeAspect="1"/>
+          </p:cNvPicPr>
           <p:nvPr/>
-        </p:nvGrpSpPr>
-        <p:grpSpPr>
+        </p:nvPicPr>
+        <p:blipFill>
+          <a:blip r:embed="rId4">
+            <a:extLst>
+              <a:ext uri="{28A0092B-C50C-407E-A947-70E740481C1C}">
+                <a14:useLocalDpi xmlns:a14="http://schemas.microsoft.com/office/drawing/2010/main" val="0"/>
+              </a:ext>
+            </a:extLst>
+          </a:blip>
+          <a:srcRect l="59991" t="43542" r="8529" b="42473"/>
+          <a:stretch>
+            <a:fillRect/>
+          </a:stretch>
+        </p:blipFill>
+        <p:spPr>
           <a:xfrm>
-            <a:off x="4023082" y="3304338"/>
-            <a:ext cx="823761" cy="472440"/>
-            <a:chOff x="1127760" y="0"/>
-            <a:chExt cx="9353676" cy="5364480"/>
+            <a:off x="6872469" y="3527549"/>
+            <a:ext cx="1372096" cy="609570"/>
           </a:xfrm>
-        </p:grpSpPr>
-        <p:pic>
-          <p:nvPicPr>
-            <p:cNvPr id="2" name="Image 1">
-              <a:extLst>
-                <a:ext uri="{FF2B5EF4-FFF2-40B4-BE49-F238E27FC236}">
-                  <a16:creationId xmlns:a16="http://schemas.microsoft.com/office/drawing/2014/main" id="{EE9E13BA-5324-D1D2-C9B5-B6E54BC88605}"/>
-                </a:ext>
-              </a:extLst>
-            </p:cNvPr>
-            <p:cNvPicPr>
-              <a:picLocks noChangeAspect="1"/>
-            </p:cNvPicPr>
-            <p:nvPr/>
-          </p:nvPicPr>
-          <p:blipFill>
-            <a:blip r:embed="rId3">
-              <a:extLst>
-                <a:ext uri="{28A0092B-C50C-407E-A947-70E740481C1C}">
-                  <a14:useLocalDpi xmlns:a14="http://schemas.microsoft.com/office/drawing/2010/main" val="0"/>
-                </a:ext>
-              </a:extLst>
-            </a:blip>
-            <a:srcRect l="20395" t="31067" r="41228" b="30336"/>
-            <a:stretch>
-              <a:fillRect/>
-            </a:stretch>
-          </p:blipFill>
-          <p:spPr>
-            <a:xfrm>
-              <a:off x="1127760" y="0"/>
-              <a:ext cx="5334000" cy="5364480"/>
-            </a:xfrm>
-            <a:prstGeom prst="rect">
-              <a:avLst/>
-            </a:prstGeom>
-          </p:spPr>
-        </p:pic>
-        <p:sp>
-          <p:nvSpPr>
-            <p:cNvPr id="3" name="Rectangle : coins arrondis 2">
-              <a:extLst>
-                <a:ext uri="{FF2B5EF4-FFF2-40B4-BE49-F238E27FC236}">
-                  <a16:creationId xmlns:a16="http://schemas.microsoft.com/office/drawing/2014/main" id="{2EC77536-06BF-8CAA-625F-8314F1E5A9D8}"/>
-                </a:ext>
-              </a:extLst>
-            </p:cNvPr>
-            <p:cNvSpPr/>
-            <p:nvPr/>
-          </p:nvSpPr>
-          <p:spPr>
-            <a:xfrm rot="21389571">
-              <a:off x="7164196" y="2436979"/>
-              <a:ext cx="3317240" cy="143932"/>
-            </a:xfrm>
-            <a:prstGeom prst="roundRect">
-              <a:avLst>
-                <a:gd name="adj" fmla="val 50000"/>
-              </a:avLst>
-            </a:prstGeom>
-            <a:solidFill>
-              <a:srgbClr val="191818"/>
-            </a:solidFill>
-            <a:ln>
-              <a:noFill/>
-            </a:ln>
-          </p:spPr>
-          <p:style>
-            <a:lnRef idx="2">
-              <a:schemeClr val="dk1">
-                <a:shade val="15000"/>
-              </a:schemeClr>
-            </a:lnRef>
-            <a:fillRef idx="1">
-              <a:schemeClr val="dk1"/>
-            </a:fillRef>
-            <a:effectRef idx="0">
-              <a:schemeClr val="dk1"/>
-            </a:effectRef>
-            <a:fontRef idx="minor">
-              <a:schemeClr val="lt1"/>
-            </a:fontRef>
-          </p:style>
-          <p:txBody>
-            <a:bodyPr rtlCol="0" anchor="ctr"/>
-            <a:lstStyle/>
-            <a:p>
-              <a:pPr algn="ctr"/>
-              <a:endParaRPr lang="fr-FR"/>
-            </a:p>
-          </p:txBody>
-        </p:sp>
-        <p:sp>
-          <p:nvSpPr>
-            <p:cNvPr id="4" name="Rectangle : coins arrondis 3">
-              <a:extLst>
-                <a:ext uri="{FF2B5EF4-FFF2-40B4-BE49-F238E27FC236}">
-                  <a16:creationId xmlns:a16="http://schemas.microsoft.com/office/drawing/2014/main" id="{6A3A30CB-932A-3265-1643-8D4A094A1F34}"/>
-                </a:ext>
-              </a:extLst>
-            </p:cNvPr>
-            <p:cNvSpPr/>
-            <p:nvPr/>
-          </p:nvSpPr>
-          <p:spPr>
-            <a:xfrm rot="323063">
-              <a:off x="7162336" y="3252088"/>
-              <a:ext cx="3317240" cy="143932"/>
-            </a:xfrm>
-            <a:prstGeom prst="roundRect">
-              <a:avLst>
-                <a:gd name="adj" fmla="val 50000"/>
-              </a:avLst>
-            </a:prstGeom>
-            <a:solidFill>
-              <a:srgbClr val="191818"/>
-            </a:solidFill>
-            <a:ln>
-              <a:noFill/>
-            </a:ln>
-          </p:spPr>
-          <p:style>
-            <a:lnRef idx="2">
-              <a:schemeClr val="dk1">
-                <a:shade val="15000"/>
-              </a:schemeClr>
-            </a:lnRef>
-            <a:fillRef idx="1">
-              <a:schemeClr val="dk1"/>
-            </a:fillRef>
-            <a:effectRef idx="0">
-              <a:schemeClr val="dk1"/>
-            </a:effectRef>
-            <a:fontRef idx="minor">
-              <a:schemeClr val="lt1"/>
-            </a:fontRef>
-          </p:style>
-          <p:txBody>
-            <a:bodyPr rtlCol="0" anchor="ctr"/>
-            <a:lstStyle/>
-            <a:p>
-              <a:pPr algn="ctr"/>
-              <a:endParaRPr lang="fr-FR"/>
-            </a:p>
-          </p:txBody>
-        </p:sp>
-        <p:sp>
-          <p:nvSpPr>
-            <p:cNvPr id="5" name="Rectangle : coins arrondis 4">
-              <a:extLst>
-                <a:ext uri="{FF2B5EF4-FFF2-40B4-BE49-F238E27FC236}">
-                  <a16:creationId xmlns:a16="http://schemas.microsoft.com/office/drawing/2014/main" id="{3DD1848C-FABD-8E15-B6B0-AA1ECB8810BB}"/>
-                </a:ext>
-              </a:extLst>
-            </p:cNvPr>
-            <p:cNvSpPr/>
-            <p:nvPr/>
-          </p:nvSpPr>
-          <p:spPr>
-            <a:xfrm rot="705653">
-              <a:off x="7077668" y="3985261"/>
-              <a:ext cx="3317240" cy="143932"/>
-            </a:xfrm>
-            <a:prstGeom prst="roundRect">
-              <a:avLst>
-                <a:gd name="adj" fmla="val 50000"/>
-              </a:avLst>
-            </a:prstGeom>
-            <a:solidFill>
-              <a:srgbClr val="191818"/>
-            </a:solidFill>
-            <a:ln>
-              <a:noFill/>
-            </a:ln>
-          </p:spPr>
-          <p:style>
-            <a:lnRef idx="2">
-              <a:schemeClr val="dk1">
-                <a:shade val="15000"/>
-              </a:schemeClr>
-            </a:lnRef>
-            <a:fillRef idx="1">
-              <a:schemeClr val="dk1"/>
-            </a:fillRef>
-            <a:effectRef idx="0">
-              <a:schemeClr val="dk1"/>
-            </a:effectRef>
-            <a:fontRef idx="minor">
-              <a:schemeClr val="lt1"/>
-            </a:fontRef>
-          </p:style>
-          <p:txBody>
-            <a:bodyPr rtlCol="0" anchor="ctr"/>
-            <a:lstStyle/>
-            <a:p>
-              <a:pPr algn="ctr"/>
-              <a:endParaRPr lang="fr-FR"/>
-            </a:p>
-          </p:txBody>
-        </p:sp>
-      </p:grpSp>
+          <a:prstGeom prst="rect">
+            <a:avLst/>
+          </a:prstGeom>
+        </p:spPr>
+      </p:pic>
     </p:spTree>
     <p:extLst>
       <p:ext uri="{BB962C8B-B14F-4D97-AF65-F5344CB8AC3E}">
